--- a/assets/slides/lecture-20-slides.pptx
+++ b/assets/slides/lecture-20-slides.pptx
@@ -7347,7 +7347,7 @@
           <a:p>
             <a:pPr algn="l"/>
             <a:r>
-              <a:rPr sz="1650" b="0" i="0">
+              <a:rPr sz="1650" b="0" i="0" dirty="0">
                 <a:solidFill>
                   <a:srgbClr val="182028"/>
                 </a:solidFill>
